--- a/deck/journey/Roadmap.pptx
+++ b/deck/journey/Roadmap.pptx
@@ -504,15 +504,18 @@
               <a:rPr lang="en-US" dirty="0"/>
               <a:t>This is the roadmap. Three phases, about a year. The months are illustrative. What I want you to take away is the order, and why.
 My rule is simple. Each phase earns the next one. I don't build the next layer on something I haven't proven.
-Phase 1 has two milestones.
-Milestone 1 is building the library. That is Part 1, the one we just saw. The business value is one central place with every policy we cover, and exactly what each one wants checked. Today that knowledge lives in documents and in people's heads. In the library, every rule traces to the policy's own words. Every change is versioned and audited. And once a policy is approved, the next service reuses it. This milestone alone doesn't move a metric. It is the foundation. So I measure it by how fast we can onboard a service, and whether every rule traces back to an exact quote.
-Milestone 2 is deciding every packet. That is Part 2, and this is where the north star moves. Right-first-time rate. Out of every 100 requests, how many get the right answer the first time, with no back and forth. It helps everyone. The nurse stops hunting through the packet. The provider stops re-sending. The member gets a decision sooner. And the plan has fewer appeals and meets the CMS clock.
+Let me start with Phase 1, because it is the heart of this.
+Phase 1 has one goal. Get each request decided right the first time, with a person still making the decision. The measure is the right-first-time rate. That is my north star. Out of every 100 requests, how many get the right answer the first time, with no back and forth.
+To get there, Phase 1 has two milestones. They ladder up to that goal, and the first makes the second possible.
+Milestone 1 is to build the library. Think of it as the rulebook. It is one central place with every policy we cover, written as a checklist of exactly what each one wants to see in a request. Today that knowledge lives in documents and in people's heads. In the library, every item traces back to the policy's own words. Every change is versioned and audited. And once a policy is in, the next service reuses it. This milestone doesn't move the north star by itself. It is the foundation. So I measure it by how fast we can add a service, and whether every item traces to an exact quote.
+Milestone 2 is to decide every packet. When a request comes in, the AI checks it against that checklist and gives the nurse a recommendation, with the evidence. The nurse confirms. This is where the north star moves. It helps everyone. The nurse stops hunting through the packet. The provider stops re-sending. The member gets a decision sooner. And the plan has fewer appeals and meets the CMS clock.
 Why start here? Three reasons. First, this is where the delay lives. A pend doesn't stop the CMS clock, so every avoidable pend is a lost loop. Second, it is the safest place to start, because a person decides every case. The AI recommends, the nurse confirms, and only the director can deny. Third, it builds the record: every decision, with its evidence. Everything after this depends on that record.
 And why the library before the packets? Because the AI only ever uses what a person approved. If the library is wrong, every packet is wrong. So I make the foundation solid first. Then I run it in shadow, beside the nurses, before any nurse sees a recommendation. The gate to leave Phase 1 is a tested library, and evals on real labeled cases with zero wrong approvals.
-Phase 2 is scale. I add services one at a time, ranked by Humana's own request history. Why now and not earlier? The onboarding flow is already built, and each new service reuses policies. But I only widen after Phase 1 is proven. Each new service has its own gate, and the ML team owns the test packets. The value goes to the plan: more of the volume covered.
+Phase 2 is scale. I add services one at a time, ranked by Humana's own request history. Why now and not earlier? How I add a service is already designed, and each new service reuses policies. But I only widen after Phase 1 is proven. Each new service has its own gate, and the ML team owns the test packets. The value goes to the plan: more of the volume covered.
 Phase 3 is member status. The member sees where a request stands. Why last? A status is only as good as the record behind it. If I show a member a status I can't stand behind, I make things worse. So it reads the trusted record from the first two phases, and it needs a compliance review before a member sees anything.
 I'll be honest about the date. From January 2027, plans must offer a Patient Access API with prior authorization information. A year-long plan lands after that. So I'm not saying this phase meets the requirement. I'm saying it builds on the record, next to whatever the plan builds for the mandate.
-So the roadmap is a trust ladder. Prove it is right. Then widen it. Then show it to the member. A person decides in every phase, and the AI never denies. I'll talk about the money after the demo.</a:t>
+So the roadmap is a trust ladder. Prove it is right. Then widen it. Then show it to the member. A person decides in every phase, and the AI never denies.
+Now let me show you what Phase 1 looks like, step by step.</a:t>
             </a:r>
             <a:endParaRPr lang="en-US" dirty="0"/>
           </a:p>
@@ -1176,7 +1179,7 @@
                 <a:ea typeface="Calibri" pitchFamily="34" charset="-122"/>
                 <a:cs typeface="Calibri" pitchFamily="34" charset="-120"/>
               </a:rPr>
-              <a:t>North star: right-first-time rate</a:t>
+              <a:t>North star: right-first-time rate. Two milestones ladder up to it.</a:t>
             </a:r>
             <a:endParaRPr lang="en-US" sz="1150" dirty="0"/>
           </a:p>

--- a/deck/journey/Roadmap.pptx
+++ b/deck/journey/Roadmap.pptx
@@ -502,20 +502,17 @@
           <a:p>
             <a:r>
               <a:rPr lang="en-US" dirty="0"/>
-              <a:t>This is the roadmap. Three phases, about a year. The months are illustrative. What I want you to take away is the order, and why.
-My rule is simple. Each phase earns the next one. I don't build the next layer on something I haven't proven.
-Let me start with Phase 1, because it is the heart of this.
-Phase 1 has one goal. Get each request decided right the first time, with a person still making the decision. The measure is the right-first-time rate. That is my north star. Out of every 100 requests, how many get the right answer the first time, with no back and forth.
-To get there, Phase 1 has two milestones. They ladder up to that goal, and the first makes the second possible.
-Milestone 1 is to build the library. Think of it as the rulebook. It is one central place with every policy we cover, written as a checklist of exactly what each one wants to see in a request. Today that knowledge lives in documents and in people's heads. In the library, every item traces back to the policy's own words. Every change is versioned and audited. And once a policy is in, the next service reuses it. This milestone doesn't move the north star by itself. It is the foundation. So I measure it by how fast we can add a service, and whether every item traces to an exact quote.
-Milestone 2 is to decide every packet. When a request comes in, the AI checks it against that checklist and gives the nurse a recommendation, with the evidence. The nurse confirms. This is where the north star moves. It helps everyone. The nurse stops hunting through the packet. The provider stops re-sending. The member gets a decision sooner. And the plan has fewer appeals and meets the CMS clock.
-Why start here? Three reasons. First, this is where the delay lives. A pend doesn't stop the CMS clock, so every avoidable pend is a lost loop. Second, it is the safest place to start, because a person decides every case. The AI recommends, the nurse confirms, and only the director can deny. Third, it builds the record: every decision, with its evidence. Everything after this depends on that record.
-And why the library before the packets? Because the AI only ever uses what a person approved. If the library is wrong, every packet is wrong. So I make the foundation solid first. Then I run it in shadow, beside the nurses, before any nurse sees a recommendation. The gate to leave Phase 1 is a tested library, and evals on real labeled cases with zero wrong approvals.
-Phase 2 is scale. I add services one at a time, ranked by Humana's own request history. Why now and not earlier? How I add a service is already designed, and each new service reuses policies. But I only widen after Phase 1 is proven. Each new service has its own gate, and the ML team owns the test packets. The value goes to the plan: more of the volume covered.
-Phase 3 is member status. The member sees where a request stands. Why last? A status is only as good as the record behind it. If I show a member a status I can't stand behind, I make things worse. So it reads the trusted record from the first two phases, and it needs a compliance review before a member sees anything.
-I'll be honest about the date. From January 2027, plans must offer a Patient Access API with prior authorization information. A year-long plan lands after that. So I'm not saying this phase meets the requirement. I'm saying it builds on the record, next to whatever the plan builds for the mandate.
-So the roadmap is a trust ladder. Prove it is right. Then widen it. Then show it to the member. A person decides in every phase, and the AI never denies.
-Now let me show you what Phase 1 looks like, step by step.</a:t>
+              <a:t>This is the roadmap. Three phases, about a year. The months are illustrative. The order is what matters. My rule is simple: each phase earns the next one.
+Phase 1 has one goal. Get each request decided right the first time, with a person still deciding. The measure, my north star, is the right-first-time rate. Out of every 100 requests, how many are right the first time, with no back and forth.
+Two milestones ladder up to that goal.
+Milestone 1 is to build the library. Think of it as the rulebook. One central place with every policy we cover, written as a checklist of what each one wants to see in a request. Every item traces back to the policy's own words. It is the foundation, so I measure it by how fast we can add a service.
+Milestone 2 is to decide every packet. The AI checks each request against that checklist and gives the nurse a recommendation, with the evidence. The nurse confirms. This is where the north star moves. The nurse stops hunting. The provider stops re-sending. The member gets a decision sooner.
+Why start here? That is where the delay lives. It is the safest place, because a person decides every case. And it builds the record that everything else needs.
+Why the library first? The AI only uses what a person approved. So I get that right, then run in shadow beside the nurses before any nurse sees a recommendation. The gate to leave Phase 1 is a tested library, and zero wrong approvals on real labeled cases.
+Phase 2 is scale. I add services one at a time, ranked by Humana's own request history. Only after Phase 1 is proven.
+Phase 3 is member status. The member sees where a request stands. It comes last because a status is only as good as the record behind it, and it needs a compliance review. From January 2027, plans must offer a Patient Access API. This lands after that, so I'm not claiming it meets the mandate. It builds on the record.
+Prove it is right. Then widen it. Then show it to the member. A person decides in every phase, and the AI never denies.
+Now let me walk you through what Phase 1 looks like.</a:t>
             </a:r>
             <a:endParaRPr lang="en-US" dirty="0"/>
           </a:p>

--- a/deck/journey/Roadmap.pptx
+++ b/deck/journey/Roadmap.pptx
@@ -502,17 +502,15 @@
           <a:p>
             <a:r>
               <a:rPr lang="en-US" dirty="0"/>
-              <a:t>This is the roadmap. Three phases, about a year. The months are illustrative. The order is what matters. My rule is simple: each phase earns the next one.
-Phase 1 has one goal. Get each request decided right the first time, with a person still deciding. The measure, my north star, is the right-first-time rate. Out of every 100 requests, how many are right the first time, with no back and forth.
-Two milestones ladder up to that goal.
-Milestone 1 is to build the library. Think of it as the rulebook. One central place with every policy we cover, written as a checklist of what each one wants to see in a request. Every item traces back to the policy's own words. It is the foundation, so I measure it by how fast we can add a service.
-Milestone 2 is to decide every packet. The AI checks each request against that checklist and gives the nurse a recommendation, with the evidence. The nurse confirms. This is where the north star moves. The nurse stops hunting. The provider stops re-sending. The member gets a decision sooner.
-Why start here? That is where the delay lives. It is the safest place, because a person decides every case. And it builds the record that everything else needs.
-Why the library first? The AI only uses what a person approved. So I get that right, then run in shadow beside the nurses before any nurse sees a recommendation. The gate to leave Phase 1 is a tested library, and zero wrong approvals on real labeled cases.
-Phase 2 is scale. I add services one at a time, ranked by Humana's own request history. Only after Phase 1 is proven.
-Phase 3 is member status. The member sees where a request stands. It comes last because a status is only as good as the record behind it, and it needs a compliance review. From January 2027, plans must offer a Patient Access API. This lands after that, so I'm not claiming it meets the mandate. It builds on the record.
-Prove it is right. Then widen it. Then show it to the member. A person decides in every phase, and the AI never denies.
-Now let me walk you through what Phase 1 looks like.</a:t>
+              <a:t>This is the roadmap. Three phases, about a year. The months are illustrative. The order is what matters. Each phase earns the next one.
+We start with Phase 1. It has one goal: get each request right the first time, with a person still deciding. My north star here is the right-first-time rate. Out of every 100 requests, how many are right the first time, with no back and forth?
+Phase 1 has two milestones.
+Milestone 1 is building the rulebook. Here we onboard a new service. We attach every policy that applies to it. Then we turn each policy into a checklist. The checklist says what the policy wants to see in a request. This is the foundation that the AI in milestone 2 uses.
+Milestone 2 is the recommendation. The AI checks every request against the rulebook we created in milestone 1. It recommends what to do, with the evidence from the packet, and gives it to the nurse. The nurse stops hunting. The provider stops re-sending. And the request gets decided faster.
+Phase 2 is scale, plus a few more features. We onboard more services, ranked by Humana's own request history. And we handle a few edge cases. One is where every clinical rule is met, but the procedure isn't covered. The system will suggest the usual next step, like a covered alternative. The other is checking the provider and the facility, for the things a fax can't tell us.
+Phase 3 is member status. The member sees where a request stands. It comes last because a status is only as good as the record behind it.
+So: prove it's right, then widen it, then show it to the member. And a person decides in every phase.
+Now let me walk you through our personas in Phase 1.</a:t>
             </a:r>
             <a:endParaRPr lang="en-US" dirty="0"/>
           </a:p>
@@ -1276,7 +1274,7 @@
                 <a:ea typeface="Calibri" pitchFamily="34" charset="-122"/>
                 <a:cs typeface="Calibri" pitchFamily="34" charset="-120"/>
               </a:rPr>
-              <a:t>A tested library. Evals on real cases. Zero wrong approvals.</a:t>
+              <a:t>A tested rulebook. Evals on real cases. Zero wrong approvals.</a:t>
             </a:r>
             <a:endParaRPr lang="en-US" sz="950" dirty="0"/>
           </a:p>
@@ -1340,7 +1338,7 @@
                 <a:ea typeface="Calibri" pitchFamily="34" charset="-122"/>
                 <a:cs typeface="Calibri" pitchFamily="34" charset="-120"/>
               </a:rPr>
-              <a:t>Build the library</a:t>
+              <a:t>Build the rulebook</a:t>
             </a:r>
             <a:endParaRPr lang="en-US" sz="900" dirty="0"/>
           </a:p>
@@ -1357,7 +1355,7 @@
                 <a:ea typeface="Calibri" pitchFamily="34" charset="-122"/>
                 <a:cs typeface="Calibri" pitchFamily="34" charset="-120"/>
               </a:rPr>
-              <a:t>One central place for every policy and what it checks. Every rule traces to the policy's own words.</a:t>
+              <a:t>Onboard a service. Attach its policies. Turn each policy into a checklist of what it wants to see.</a:t>
             </a:r>
             <a:endParaRPr lang="en-US" sz="900" dirty="0"/>
           </a:p>
@@ -1421,7 +1419,7 @@
                 <a:ea typeface="Calibri" pitchFamily="34" charset="-122"/>
                 <a:cs typeface="Calibri" pitchFamily="34" charset="-120"/>
               </a:rPr>
-              <a:t>Decide every packet</a:t>
+              <a:t>Recommend on every request</a:t>
             </a:r>
             <a:endParaRPr lang="en-US" sz="900" dirty="0"/>
           </a:p>
@@ -1438,7 +1436,7 @@
                 <a:ea typeface="Calibri" pitchFamily="34" charset="-122"/>
                 <a:cs typeface="Calibri" pitchFamily="34" charset="-120"/>
               </a:rPr>
-              <a:t>Fewer pends. The right answer the first time. A sooner decision for the member.</a:t>
+              <a:t>The AI checks each request against the rulebook, with evidence. The nurse confirms.</a:t>
             </a:r>
             <a:endParaRPr lang="en-US" sz="900" dirty="0"/>
           </a:p>
@@ -1564,7 +1562,7 @@
                 <a:ea typeface="Calibri" pitchFamily="34" charset="-122"/>
                 <a:cs typeface="Calibri" pitchFamily="34" charset="-120"/>
               </a:rPr>
-              <a:t>Scale.</a:t>
+              <a:t>Scale. Edge cases.</a:t>
             </a:r>
             <a:endParaRPr lang="en-US" sz="2000" dirty="0"/>
           </a:p>
@@ -1578,8 +1576,8 @@
         </p:nvSpPr>
         <p:spPr>
           <a:xfrm>
-            <a:off x="6400800" y="2514600"/>
-            <a:ext cx="2331720" cy="1371600"/>
+            <a:off x="6400800" y="2487168"/>
+            <a:ext cx="2331720" cy="1463040"/>
           </a:xfrm>
           <a:prstGeom prst="rect">
             <a:avLst/>
@@ -1595,7 +1593,7 @@
               <a:buNone/>
             </a:pPr>
             <a:r>
-              <a:rPr lang="en-US" sz="1300" dirty="0">
+              <a:rPr lang="en-US" sz="1200" dirty="0">
                 <a:solidFill>
                   <a:srgbClr val="16211E"/>
                 </a:solidFill>
@@ -1603,9 +1601,77 @@
                 <a:ea typeface="Calibri" pitchFamily="34" charset="-122"/>
                 <a:cs typeface="Calibri" pitchFamily="34" charset="-120"/>
               </a:rPr>
-              <a:t>More services, one at a time, ranked by Humana's own request history.</a:t>
-            </a:r>
-            <a:endParaRPr lang="en-US" sz="1300" dirty="0"/>
+              <a:t>More services, ranked by Humana's request history.</a:t>
+            </a:r>
+            <a:endParaRPr lang="en-US" sz="1200" dirty="0"/>
+          </a:p>
+          <a:p>
+            <a:pPr algn="l" indent="0" marL="0">
+              <a:buNone/>
+            </a:pPr>
+            <a:r>
+              <a:rPr lang="en-US" sz="1200" dirty="0">
+                <a:solidFill>
+                  <a:srgbClr val="16211E"/>
+                </a:solidFill>
+                <a:latin typeface="Calibri" pitchFamily="34" charset="0"/>
+                <a:ea typeface="Calibri" pitchFamily="34" charset="-122"/>
+                <a:cs typeface="Calibri" pitchFamily="34" charset="-120"/>
+              </a:rPr>
+              <a:t> </a:t>
+            </a:r>
+            <a:endParaRPr lang="en-US" sz="1200" dirty="0"/>
+          </a:p>
+          <a:p>
+            <a:pPr algn="l" indent="0" marL="0">
+              <a:buNone/>
+            </a:pPr>
+            <a:r>
+              <a:rPr lang="en-US" sz="1200" dirty="0">
+                <a:solidFill>
+                  <a:srgbClr val="16211E"/>
+                </a:solidFill>
+                <a:latin typeface="Calibri" pitchFamily="34" charset="0"/>
+                <a:ea typeface="Calibri" pitchFamily="34" charset="-122"/>
+                <a:cs typeface="Calibri" pitchFamily="34" charset="-120"/>
+              </a:rPr>
+              <a:t>Edge case: every rule met, but the procedure is not covered.</a:t>
+            </a:r>
+            <a:endParaRPr lang="en-US" sz="1200" dirty="0"/>
+          </a:p>
+          <a:p>
+            <a:pPr algn="l" indent="0" marL="0">
+              <a:buNone/>
+            </a:pPr>
+            <a:r>
+              <a:rPr lang="en-US" sz="1200" dirty="0">
+                <a:solidFill>
+                  <a:srgbClr val="16211E"/>
+                </a:solidFill>
+                <a:latin typeface="Calibri" pitchFamily="34" charset="0"/>
+                <a:ea typeface="Calibri" pitchFamily="34" charset="-122"/>
+                <a:cs typeface="Calibri" pitchFamily="34" charset="-120"/>
+              </a:rPr>
+              <a:t> </a:t>
+            </a:r>
+            <a:endParaRPr lang="en-US" sz="1200" dirty="0"/>
+          </a:p>
+          <a:p>
+            <a:pPr algn="l" indent="0" marL="0">
+              <a:buNone/>
+            </a:pPr>
+            <a:r>
+              <a:rPr lang="en-US" sz="1200" dirty="0">
+                <a:solidFill>
+                  <a:srgbClr val="16211E"/>
+                </a:solidFill>
+                <a:latin typeface="Calibri" pitchFamily="34" charset="0"/>
+                <a:ea typeface="Calibri" pitchFamily="34" charset="-122"/>
+                <a:cs typeface="Calibri" pitchFamily="34" charset="-120"/>
+              </a:rPr>
+              <a:t>Edge case: checking the provider and the facility.</a:t>
+            </a:r>
+            <a:endParaRPr lang="en-US" sz="1200" dirty="0"/>
           </a:p>
         </p:txBody>
       </p:sp>
@@ -1642,7 +1708,7 @@
                 <a:ea typeface="Calibri" pitchFamily="34" charset="-122"/>
                 <a:cs typeface="Calibri" pitchFamily="34" charset="-120"/>
               </a:rPr>
-              <a:t>FOR   The plan</a:t>
+              <a:t>FOR   The plan, the director</a:t>
             </a:r>
             <a:endParaRPr lang="en-US" sz="1100" dirty="0"/>
           </a:p>
